--- a/content/decks/media-studies/media-studies-s1-lesson-07-reading-systematically-toward-the-blog-midpoint.pptx
+++ b/content/decks/media-studies/media-studies-s1-lesson-07-reading-systematically-toward-the-blog-midpoint.pptx
@@ -1481,7 +1481,7 @@
           <a:p>
             <a:r>
               <a:rPr lang="en-US" dirty="0"/>
-              <a:t>The hinge of the week: the audit is A2's marking preview, placed with working days to spare so there is still time to act.</a:t>
+              <a:t>The audit is A2's marking preview. It sits with working days to spare so there is still time to act on what it finds.</a:t>
             </a:r>
             <a:endParaRPr lang="en-US" dirty="0"/>
           </a:p>
@@ -3977,7 +3977,7 @@
       </p:grpSpPr>
       <p:pic>
         <p:nvPicPr>
-          <p:cNvPr id="2" name="Image 0" descr="/private/tmp/claude-501/-Users-dogan-Documents-Vaults-Courses/a3a5132d-721f-4cd4-8ddd-e62e2b37b51b/scratchpad/img/crops/friedrich-wanderer_a664.jpg">    </p:cNvPr>
+          <p:cNvPr id="2" name="Image 0" descr="/Users/dogan/Documents/Vaults/Courses/wiki/classes/media-studies/decks/_build/img/crops/friedrich-wanderer_a664.jpg">    </p:cNvPr>
           <p:cNvPicPr>
             <a:picLocks noChangeAspect="1"/>
           </p:cNvPicPr>
@@ -5984,7 +5984,46 @@
       </p:sp>
       <p:sp>
         <p:nvSpPr>
-          <p:cNvPr id="33" name="Shape 31"/>
+          <p:cNvPr id="33" name="Text 31"/>
+          <p:cNvSpPr/>
+          <p:nvPr/>
+        </p:nvSpPr>
+        <p:spPr>
+          <a:xfrm>
+            <a:off x="4846320" y="5870448"/>
+            <a:ext cx="6400800" cy="365760"/>
+          </a:xfrm>
+          <a:prstGeom prst="rect">
+            <a:avLst/>
+          </a:prstGeom>
+          <a:noFill/>
+          <a:ln/>
+        </p:spPr>
+        <p:txBody>
+          <a:bodyPr wrap="square" lIns="0" tIns="0" rIns="0" bIns="0" rtlCol="0" anchor="ctr"/>
+          <a:lstStyle/>
+          <a:p>
+            <a:pPr indent="0" marL="0">
+              <a:buNone/>
+            </a:pPr>
+            <a:r>
+              <a:rPr lang="en-US" sz="1150" i="1" dirty="0">
+                <a:solidFill>
+                  <a:srgbClr val="7A7F72"/>
+                </a:solidFill>
+                <a:latin typeface="Arial" pitchFamily="34" charset="0"/>
+                <a:ea typeface="Arial" pitchFamily="34" charset="-122"/>
+                <a:cs typeface="Arial" pitchFamily="34" charset="-120"/>
+              </a:rPr>
+              <a:t>The Ladder arrives in full: the order climbs rungs one and two; PEEM climbs the rest.</a:t>
+            </a:r>
+            <a:endParaRPr lang="en-US" sz="1150" dirty="0"/>
+          </a:p>
+        </p:txBody>
+      </p:sp>
+      <p:sp>
+        <p:nvSpPr>
+          <p:cNvPr id="34" name="Shape 32"/>
           <p:cNvSpPr/>
           <p:nvPr/>
         </p:nvSpPr>
@@ -6007,7 +6046,7 @@
       </p:sp>
       <p:sp>
         <p:nvSpPr>
-          <p:cNvPr id="34" name="Text 32"/>
+          <p:cNvPr id="35" name="Text 33"/>
           <p:cNvSpPr/>
           <p:nvPr/>
         </p:nvSpPr>
@@ -6046,7 +6085,7 @@
       </p:sp>
       <p:sp>
         <p:nvSpPr>
-          <p:cNvPr id="35" name="Text 33"/>
+          <p:cNvPr id="36" name="Text 34"/>
           <p:cNvSpPr/>
           <p:nvPr/>
         </p:nvSpPr>
@@ -6775,19 +6814,22 @@
         <p:spPr>
           <a:xfrm>
             <a:off x="822960" y="5212080"/>
-            <a:ext cx="10543032" cy="457200"/>
-          </a:xfrm>
-          <a:prstGeom prst="rect">
-            <a:avLst/>
-          </a:prstGeom>
-          <a:noFill/>
-          <a:ln/>
-        </p:spPr>
-        <p:txBody>
-          <a:bodyPr wrap="square" lIns="0" tIns="0" rIns="0" bIns="0" rtlCol="0" anchor="ctr"/>
+            <a:ext cx="10543032" cy="640080"/>
+          </a:xfrm>
+          <a:prstGeom prst="rect">
+            <a:avLst/>
+          </a:prstGeom>
+          <a:noFill/>
+          <a:ln/>
+        </p:spPr>
+        <p:txBody>
+          <a:bodyPr wrap="square" lIns="0" tIns="0" rIns="0" bIns="0" rtlCol="0" anchor="t"/>
           <a:lstStyle/>
           <a:p>
             <a:pPr indent="0" marL="0">
+              <a:lnSpc>
+                <a:spcPts val="1700"/>
+              </a:lnSpc>
               <a:buNone/>
             </a:pPr>
             <a:r>
@@ -6799,7 +6841,7 @@
                 <a:ea typeface="Arial" pitchFamily="34" charset="-122"/>
                 <a:cs typeface="Arial" pitchFamily="34" charset="-120"/>
               </a:rPr>
-              <a:t>The A1 pile's commonest failure is assertion: a claim with no evidence, no effect, no link. PEEM is the repair.</a:t>
+              <a:t>The A1 pile's commonest failure is assertion: a claim with no evidence, no effect, no link. PEEM is the repair: rungs three to five of the Ladder, climbed by cold call.</a:t>
             </a:r>
             <a:endParaRPr lang="en-US" sz="1250" dirty="0"/>
           </a:p>
@@ -7128,7 +7170,7 @@
       </p:grpSpPr>
       <p:pic>
         <p:nvPicPr>
-          <p:cNvPr id="2" name="Image 0" descr="/private/tmp/claude-501/-Users-dogan-Documents-Vaults-Courses/a3a5132d-721f-4cd4-8ddd-e62e2b37b51b/scratchpad/img/crops/johnston-geography_a1777.jpg">    </p:cNvPr>
+          <p:cNvPr id="2" name="Image 0" descr="/Users/dogan/Documents/Vaults/Courses/wiki/classes/media-studies/decks/_build/img/crops/johnston-geography_a1777.jpg">    </p:cNvPr>
           <p:cNvPicPr>
             <a:picLocks noChangeAspect="1"/>
           </p:cNvPicPr>
